--- a/ppt.pptx
+++ b/ppt.pptx
@@ -104,6 +104,11 @@
       </a:defRPr>
     </a:lvl9pPr>
   </p:defaultTextStyle>
+  <p:extLst>
+    <p:ext uri="{EFAFB233-063F-42B5-8137-9DF3F51BA10A}">
+      <p15:sldGuideLst xmlns:p15="http://schemas.microsoft.com/office/powerpoint/2012/main"/>
+    </p:ext>
+  </p:extLst>
 </p:presentation>
 </file>
 
@@ -112,18 +117,18 @@
   <pc:docChgLst>
     <pc:chgData userId="23179c075ace00df" providerId="LiveId" clId="{1D1010B7-34BB-4387-977D-755133678F7B}"/>
     <pc:docChg chg="custSel addSld modSld">
-      <pc:chgData name="" userId="23179c075ace00df" providerId="LiveId" clId="{1D1010B7-34BB-4387-977D-755133678F7B}" dt="2026-10-12T15:29:48.802" v="6" actId="20577"/>
+      <pc:chgData name="" userId="23179c075ace00df" providerId="LiveId" clId="{1D1010B7-34BB-4387-977D-755133678F7B}" dt="2026-10-12T15:42:45.837" v="12" actId="20577"/>
       <pc:docMkLst>
         <pc:docMk/>
       </pc:docMkLst>
       <pc:sldChg chg="delSp modSp add">
-        <pc:chgData name="" userId="23179c075ace00df" providerId="LiveId" clId="{1D1010B7-34BB-4387-977D-755133678F7B}" dt="2026-10-12T15:29:48.802" v="6" actId="20577"/>
+        <pc:chgData name="" userId="23179c075ace00df" providerId="LiveId" clId="{1D1010B7-34BB-4387-977D-755133678F7B}" dt="2026-10-12T15:42:45.837" v="12" actId="20577"/>
         <pc:sldMkLst>
           <pc:docMk/>
           <pc:sldMk cId="1224271909" sldId="256"/>
         </pc:sldMkLst>
         <pc:spChg chg="mod">
-          <ac:chgData name="" userId="23179c075ace00df" providerId="LiveId" clId="{1D1010B7-34BB-4387-977D-755133678F7B}" dt="2026-10-12T15:29:48.802" v="6" actId="20577"/>
+          <ac:chgData name="" userId="23179c075ace00df" providerId="LiveId" clId="{1D1010B7-34BB-4387-977D-755133678F7B}" dt="2026-10-12T15:42:45.837" v="12" actId="20577"/>
           <ac:spMkLst>
             <pc:docMk/>
             <pc:sldMk cId="1224271909" sldId="256"/>
@@ -3380,8 +3385,12 @@
           <a:lstStyle/>
           <a:p>
             <a:r>
-              <a:rPr lang="en-US"/>
+              <a:rPr lang="en-US" dirty="0" err="1"/>
               <a:t>Utsha</a:t>
+            </a:r>
+            <a:r>
+              <a:rPr lang="en-US"/>
+              <a:t> Roy</a:t>
             </a:r>
             <a:endParaRPr lang="en-US" dirty="0"/>
           </a:p>
